--- a/Day2_GLM/FW536_Day2_Morning_ContinuousDistributions.pptx
+++ b/Day2_GLM/FW536_Day2_Morning_ContinuousDistributions.pptx
@@ -2607,9 +2607,9 @@
           <a:bodyPr/>
           <a:lstStyle/>
           <a:p>
-            <a:endParaRPr lang="en-US" altLang="en-US">
-              <a:latin typeface="Times New Roman" charset="0"/>
-            </a:endParaRPr>
+            <a:r>
+              <a:t>Cue: Taal, open R and show estimate and standard error produce t</a:t>
+            </a:r>
           </a:p>
         </p:txBody>
       </p:sp>
@@ -20819,7 +20819,7 @@
           <a:p>
             <a:r>
               <a:rPr lang="en-US" dirty="0"/>
-              <a:t>Taal, open R and show estimate and standard error produce t</a:t>
+              <a:t/>
             </a:r>
           </a:p>
         </p:txBody>
